--- a/final_presentation.pptx
+++ b/final_presentation.pptx
@@ -5,7 +5,7 @@
     <p:sldMasterId id="2147483648" r:id="rId4"/>
   </p:sldMasterIdLst>
   <p:notesMasterIdLst>
-    <p:notesMasterId r:id="rId20"/>
+    <p:notesMasterId r:id="rId24"/>
   </p:notesMasterIdLst>
   <p:sldIdLst>
     <p:sldId id="256" r:id="rId5"/>
@@ -21,8 +21,12 @@
     <p:sldId id="266" r:id="rId15"/>
     <p:sldId id="267" r:id="rId16"/>
     <p:sldId id="268" r:id="rId17"/>
-    <p:sldId id="269" r:id="rId18"/>
-    <p:sldId id="270" r:id="rId19"/>
+    <p:sldId id="271" r:id="rId18"/>
+    <p:sldId id="269" r:id="rId19"/>
+    <p:sldId id="272" r:id="rId20"/>
+    <p:sldId id="273" r:id="rId21"/>
+    <p:sldId id="270" r:id="rId22"/>
+    <p:sldId id="274" r:id="rId23"/>
   </p:sldIdLst>
   <p:sldSz cx="12192000" cy="6858000"/>
   <p:notesSz cx="6858000" cy="9144000"/>
@@ -211,7 +215,7 @@
           <a:p>
             <a:fld id="{C452ADB1-275D-430A-89EE-5C7E6CFF6FF2}" type="datetimeFigureOut">
               <a:rPr lang="en-US" smtClean="0"/>
-              <a:t>8/10/2026</a:t>
+              <a:t>8/14/2026</a:t>
             </a:fld>
             <a:endParaRPr lang="en-US" dirty="0"/>
           </a:p>
@@ -9285,7 +9289,7 @@
           <a:p>
             <a:fld id="{F53FAE64-2F1B-47AD-96F3-CA35460E01C7}" type="datetime1">
               <a:rPr lang="en-US" smtClean="0"/>
-              <a:t>8/10/2026</a:t>
+              <a:t>8/14/2026</a:t>
             </a:fld>
             <a:endParaRPr lang="en-US" dirty="0"/>
           </a:p>
@@ -9491,7 +9495,7 @@
           <a:p>
             <a:fld id="{4F6D5E30-6AB7-44C4-A5CB-C088C6BEF203}" type="datetime1">
               <a:rPr lang="en-US" smtClean="0"/>
-              <a:t>8/10/2026</a:t>
+              <a:t>8/14/2026</a:t>
             </a:fld>
             <a:endParaRPr lang="en-US" dirty="0"/>
           </a:p>
@@ -9670,7 +9674,7 @@
           <a:p>
             <a:fld id="{E706BE9C-AFC8-48AF-BA3E-F4406B570D4B}" type="datetime1">
               <a:rPr lang="en-US" smtClean="0"/>
-              <a:t>8/10/2026</a:t>
+              <a:t>8/14/2026</a:t>
             </a:fld>
             <a:endParaRPr lang="en-US" dirty="0"/>
           </a:p>
@@ -9874,7 +9878,7 @@
           <a:p>
             <a:fld id="{53F8AFFE-7D21-49C3-A787-D64AF1905E62}" type="datetime1">
               <a:rPr lang="en-US" smtClean="0"/>
-              <a:t>8/10/2026</a:t>
+              <a:t>8/14/2026</a:t>
             </a:fld>
             <a:endParaRPr lang="en-US" dirty="0"/>
           </a:p>
@@ -18771,7 +18775,7 @@
           <a:p>
             <a:fld id="{C9729097-6EF5-45C1-8A89-1E1AC74DD17E}" type="datetime1">
               <a:rPr lang="en-US" smtClean="0"/>
-              <a:t>8/10/2026</a:t>
+              <a:t>8/14/2026</a:t>
             </a:fld>
             <a:endParaRPr lang="en-US" dirty="0"/>
           </a:p>
@@ -19044,7 +19048,7 @@
           <a:p>
             <a:fld id="{07D31800-4390-41BB-B66D-0BF854728D3B}" type="datetime1">
               <a:rPr lang="en-US" smtClean="0"/>
-              <a:t>8/10/2026</a:t>
+              <a:t>8/14/2026</a:t>
             </a:fld>
             <a:endParaRPr lang="en-US" dirty="0"/>
           </a:p>
@@ -19441,7 +19445,7 @@
           <a:p>
             <a:fld id="{F3016119-7418-4941-8BFB-252980A6B8EB}" type="datetime1">
               <a:rPr lang="en-US" smtClean="0"/>
-              <a:t>8/10/2026</a:t>
+              <a:t>8/14/2026</a:t>
             </a:fld>
             <a:endParaRPr lang="en-US" dirty="0"/>
           </a:p>
@@ -19558,7 +19562,7 @@
           <a:p>
             <a:fld id="{97CF032D-20D7-43DE-AF2F-AC94D62630EF}" type="datetime1">
               <a:rPr lang="en-US" smtClean="0"/>
-              <a:t>8/10/2026</a:t>
+              <a:t>8/14/2026</a:t>
             </a:fld>
             <a:endParaRPr lang="en-US" dirty="0"/>
           </a:p>
@@ -19652,7 +19656,7 @@
           <a:p>
             <a:fld id="{3FA916F7-B21F-4D3B-931F-4E7DCD7D8EC5}" type="datetime1">
               <a:rPr lang="en-US" smtClean="0"/>
-              <a:t>8/10/2026</a:t>
+              <a:t>8/14/2026</a:t>
             </a:fld>
             <a:endParaRPr lang="en-US" dirty="0"/>
           </a:p>
@@ -19941,7 +19945,7 @@
           <a:p>
             <a:fld id="{E7CD7EFD-5179-4DCD-9DD2-15C79218A131}" type="datetime1">
               <a:rPr lang="en-US" smtClean="0"/>
-              <a:t>8/10/2026</a:t>
+              <a:t>8/14/2026</a:t>
             </a:fld>
             <a:endParaRPr lang="en-US" dirty="0"/>
           </a:p>
@@ -20220,7 +20224,7 @@
           <a:p>
             <a:fld id="{2EFDC1EF-1A0E-40CC-B33E-64C20C1210F9}" type="datetime1">
               <a:rPr lang="en-US" smtClean="0"/>
-              <a:t>8/10/2026</a:t>
+              <a:t>8/14/2026</a:t>
             </a:fld>
             <a:endParaRPr lang="en-US" dirty="0"/>
           </a:p>
@@ -20469,7 +20473,7 @@
           <a:p>
             <a:fld id="{58E0DE55-5DD4-4C9B-96DE-5A21E7BD76D8}" type="datetime1">
               <a:rPr lang="en-US" smtClean="0"/>
-              <a:t>8/10/2026</a:t>
+              <a:t>8/14/2026</a:t>
             </a:fld>
             <a:endParaRPr lang="en-US" dirty="0"/>
           </a:p>
@@ -21227,16 +21231,16 @@
                   <a:srgbClr val="FFFFFF"/>
                 </a:solidFill>
               </a:rPr>
-              <a:t>Capstone Project 2021</a:t>
+              <a:t>Capstone </a:t>
             </a:r>
-            <a:fld id="{3A61F8EC-CBA0-4EE1-ADC2-64EC1685A0FA}" type="slidenum">
-              <a:rPr lang="en-US" smtClean="0">
+            <a:r>
+              <a:rPr lang="en-US">
                 <a:solidFill>
                   <a:srgbClr val="FFFFFF"/>
                 </a:solidFill>
               </a:rPr>
-              <a:t>1</a:t>
-            </a:fld>
+              <a:t>Project 2021</a:t>
+            </a:r>
             <a:endParaRPr lang="en-US" dirty="0">
               <a:solidFill>
                 <a:srgbClr val="FFFFFF"/>
@@ -21320,7 +21324,7 @@
           <a:p>
             <a:fld id="{054BEE79-B278-499F-AEF2-37C9A36D61DE}" type="datetime1">
               <a:rPr lang="en-US" smtClean="0"/>
-              <a:t>8/10/2026</a:t>
+              <a:t>8/14/2026</a:t>
             </a:fld>
             <a:endParaRPr lang="en-US" dirty="0"/>
           </a:p>
@@ -21495,7 +21499,7 @@
           <a:p>
             <a:fld id="{53F8AFFE-7D21-49C3-A787-D64AF1905E62}" type="datetime1">
               <a:rPr lang="en-US" smtClean="0"/>
-              <a:t>8/10/2026</a:t>
+              <a:t>8/14/2026</a:t>
             </a:fld>
             <a:endParaRPr lang="en-US" dirty="0"/>
           </a:p>
@@ -21713,7 +21717,7 @@
           <a:p>
             <a:fld id="{53F8AFFE-7D21-49C3-A787-D64AF1905E62}" type="datetime1">
               <a:rPr lang="en-US" smtClean="0"/>
-              <a:t>8/10/2026</a:t>
+              <a:t>8/14/2026</a:t>
             </a:fld>
             <a:endParaRPr lang="en-US" dirty="0"/>
           </a:p>
@@ -21977,7 +21981,7 @@
           <a:p>
             <a:fld id="{53F8AFFE-7D21-49C3-A787-D64AF1905E62}" type="datetime1">
               <a:rPr lang="en-US" smtClean="0"/>
-              <a:t>8/10/2026</a:t>
+              <a:t>8/14/2026</a:t>
             </a:fld>
             <a:endParaRPr lang="en-US" dirty="0"/>
           </a:p>
@@ -22187,7 +22191,7 @@
           <a:p>
             <a:fld id="{53F8AFFE-7D21-49C3-A787-D64AF1905E62}" type="datetime1">
               <a:rPr lang="en-US" smtClean="0"/>
-              <a:t>8/10/2026</a:t>
+              <a:t>8/14/2026</a:t>
             </a:fld>
             <a:endParaRPr lang="en-US" dirty="0"/>
           </a:p>
@@ -22273,7 +22277,7 @@
         </p:blipFill>
         <p:spPr>
           <a:xfrm>
-            <a:off x="3614048" y="1775368"/>
+            <a:off x="3856364" y="1727412"/>
             <a:ext cx="4963904" cy="3673023"/>
           </a:xfrm>
           <a:prstGeom prst="rect">
@@ -22351,6 +22355,241 @@
           <p:cNvPr id="2" name="Title 1">
             <a:extLst>
               <a:ext uri="{FF2B5EF4-FFF2-40B4-BE49-F238E27FC236}">
+                <a16:creationId xmlns:a16="http://schemas.microsoft.com/office/drawing/2014/main" id="{0C1163A6-D2CD-D097-862B-26A36B3589DD}"/>
+              </a:ext>
+            </a:extLst>
+          </p:cNvPr>
+          <p:cNvSpPr>
+            <a:spLocks noGrp="1"/>
+          </p:cNvSpPr>
+          <p:nvPr>
+            <p:ph type="title"/>
+          </p:nvPr>
+        </p:nvSpPr>
+        <p:spPr/>
+        <p:txBody>
+          <a:bodyPr/>
+          <a:lstStyle/>
+          <a:p>
+            <a:r>
+              <a:rPr lang="en-SG" dirty="0"/>
+              <a:t>Model Evaluation</a:t>
+            </a:r>
+          </a:p>
+        </p:txBody>
+      </p:sp>
+      <p:sp>
+        <p:nvSpPr>
+          <p:cNvPr id="4" name="Date Placeholder 3">
+            <a:extLst>
+              <a:ext uri="{FF2B5EF4-FFF2-40B4-BE49-F238E27FC236}">
+                <a16:creationId xmlns:a16="http://schemas.microsoft.com/office/drawing/2014/main" id="{FA8C1BAB-FEF2-4990-35C6-5FF4CE4F8C6B}"/>
+              </a:ext>
+            </a:extLst>
+          </p:cNvPr>
+          <p:cNvSpPr>
+            <a:spLocks noGrp="1"/>
+          </p:cNvSpPr>
+          <p:nvPr>
+            <p:ph type="dt" sz="half" idx="10"/>
+          </p:nvPr>
+        </p:nvSpPr>
+        <p:spPr/>
+        <p:txBody>
+          <a:bodyPr/>
+          <a:lstStyle/>
+          <a:p>
+            <a:fld id="{53F8AFFE-7D21-49C3-A787-D64AF1905E62}" type="datetime1">
+              <a:rPr lang="en-US" smtClean="0"/>
+              <a:t>8/14/2026</a:t>
+            </a:fld>
+            <a:endParaRPr lang="en-US" dirty="0"/>
+          </a:p>
+        </p:txBody>
+      </p:sp>
+      <p:sp>
+        <p:nvSpPr>
+          <p:cNvPr id="5" name="Footer Placeholder 4">
+            <a:extLst>
+              <a:ext uri="{FF2B5EF4-FFF2-40B4-BE49-F238E27FC236}">
+                <a16:creationId xmlns:a16="http://schemas.microsoft.com/office/drawing/2014/main" id="{883E76AD-1A8F-F727-EFE8-1814682A67CE}"/>
+              </a:ext>
+            </a:extLst>
+          </p:cNvPr>
+          <p:cNvSpPr>
+            <a:spLocks noGrp="1"/>
+          </p:cNvSpPr>
+          <p:nvPr>
+            <p:ph type="ftr" sz="quarter" idx="11"/>
+          </p:nvPr>
+        </p:nvSpPr>
+        <p:spPr/>
+        <p:txBody>
+          <a:bodyPr/>
+          <a:lstStyle/>
+          <a:p>
+            <a:r>
+              <a:rPr lang="en-US"/>
+              <a:t>SDAAI/Final Presentation/Capstone Project 2021</a:t>
+            </a:r>
+            <a:endParaRPr lang="en-US" dirty="0"/>
+          </a:p>
+        </p:txBody>
+      </p:sp>
+      <p:sp>
+        <p:nvSpPr>
+          <p:cNvPr id="6" name="Slide Number Placeholder 5">
+            <a:extLst>
+              <a:ext uri="{FF2B5EF4-FFF2-40B4-BE49-F238E27FC236}">
+                <a16:creationId xmlns:a16="http://schemas.microsoft.com/office/drawing/2014/main" id="{211AA968-7593-E380-6072-3A6C87B50C77}"/>
+              </a:ext>
+            </a:extLst>
+          </p:cNvPr>
+          <p:cNvSpPr>
+            <a:spLocks noGrp="1"/>
+          </p:cNvSpPr>
+          <p:nvPr>
+            <p:ph type="sldNum" sz="quarter" idx="12"/>
+          </p:nvPr>
+        </p:nvSpPr>
+        <p:spPr/>
+        <p:txBody>
+          <a:bodyPr/>
+          <a:lstStyle/>
+          <a:p>
+            <a:fld id="{4FAB73BC-B049-4115-A692-8D63A059BFB8}" type="slidenum">
+              <a:rPr lang="en-US" smtClean="0"/>
+              <a:t>14</a:t>
+            </a:fld>
+            <a:endParaRPr lang="en-US" dirty="0"/>
+          </a:p>
+        </p:txBody>
+      </p:sp>
+      <p:pic>
+        <p:nvPicPr>
+          <p:cNvPr id="8" name="Picture 7">
+            <a:extLst>
+              <a:ext uri="{FF2B5EF4-FFF2-40B4-BE49-F238E27FC236}">
+                <a16:creationId xmlns:a16="http://schemas.microsoft.com/office/drawing/2014/main" id="{7EF52C04-9999-317F-0CFB-84B5E00E9C72}"/>
+              </a:ext>
+            </a:extLst>
+          </p:cNvPr>
+          <p:cNvPicPr>
+            <a:picLocks noChangeAspect="1"/>
+          </p:cNvPicPr>
+          <p:nvPr/>
+        </p:nvPicPr>
+        <p:blipFill>
+          <a:blip r:embed="rId2"/>
+          <a:stretch>
+            <a:fillRect/>
+          </a:stretch>
+        </p:blipFill>
+        <p:spPr>
+          <a:xfrm>
+            <a:off x="569180" y="2413251"/>
+            <a:ext cx="3560611" cy="2631021"/>
+          </a:xfrm>
+          <a:prstGeom prst="rect">
+            <a:avLst/>
+          </a:prstGeom>
+        </p:spPr>
+      </p:pic>
+      <p:pic>
+        <p:nvPicPr>
+          <p:cNvPr id="10" name="Picture 9">
+            <a:extLst>
+              <a:ext uri="{FF2B5EF4-FFF2-40B4-BE49-F238E27FC236}">
+                <a16:creationId xmlns:a16="http://schemas.microsoft.com/office/drawing/2014/main" id="{D6646105-F2CC-E609-8D28-322C27AA2567}"/>
+              </a:ext>
+            </a:extLst>
+          </p:cNvPr>
+          <p:cNvPicPr>
+            <a:picLocks noChangeAspect="1"/>
+          </p:cNvPicPr>
+          <p:nvPr/>
+        </p:nvPicPr>
+        <p:blipFill>
+          <a:blip r:embed="rId3"/>
+          <a:stretch>
+            <a:fillRect/>
+          </a:stretch>
+        </p:blipFill>
+        <p:spPr>
+          <a:xfrm>
+            <a:off x="4115641" y="2363011"/>
+            <a:ext cx="3882930" cy="2886210"/>
+          </a:xfrm>
+          <a:prstGeom prst="rect">
+            <a:avLst/>
+          </a:prstGeom>
+        </p:spPr>
+      </p:pic>
+      <p:pic>
+        <p:nvPicPr>
+          <p:cNvPr id="15" name="Picture 14">
+            <a:extLst>
+              <a:ext uri="{FF2B5EF4-FFF2-40B4-BE49-F238E27FC236}">
+                <a16:creationId xmlns:a16="http://schemas.microsoft.com/office/drawing/2014/main" id="{D57277EA-0FBA-EECF-709F-9E127B039254}"/>
+              </a:ext>
+            </a:extLst>
+          </p:cNvPr>
+          <p:cNvPicPr>
+            <a:picLocks noChangeAspect="1"/>
+          </p:cNvPicPr>
+          <p:nvPr/>
+        </p:nvPicPr>
+        <p:blipFill>
+          <a:blip r:embed="rId4"/>
+          <a:stretch>
+            <a:fillRect/>
+          </a:stretch>
+        </p:blipFill>
+        <p:spPr>
+          <a:xfrm>
+            <a:off x="7998571" y="2393978"/>
+            <a:ext cx="3882930" cy="2899910"/>
+          </a:xfrm>
+          <a:prstGeom prst="rect">
+            <a:avLst/>
+          </a:prstGeom>
+        </p:spPr>
+      </p:pic>
+    </p:spTree>
+    <p:extLst>
+      <p:ext uri="{BB962C8B-B14F-4D97-AF65-F5344CB8AC3E}">
+        <p14:creationId xmlns:p14="http://schemas.microsoft.com/office/powerpoint/2010/main" val="3903334241"/>
+      </p:ext>
+    </p:extLst>
+  </p:cSld>
+  <p:clrMapOvr>
+    <a:masterClrMapping/>
+  </p:clrMapOvr>
+</p:sld>
+</file>
+
+<file path=ppt/slides/slide15.xml><?xml version="1.0" encoding="utf-8"?>
+<p:sld xmlns:a="http://schemas.openxmlformats.org/drawingml/2006/main" xmlns:r="http://schemas.openxmlformats.org/officeDocument/2006/relationships" xmlns:p="http://schemas.openxmlformats.org/presentationml/2006/main">
+  <p:cSld>
+    <p:spTree>
+      <p:nvGrpSpPr>
+        <p:cNvPr id="1" name=""/>
+        <p:cNvGrpSpPr/>
+        <p:nvPr/>
+      </p:nvGrpSpPr>
+      <p:grpSpPr>
+        <a:xfrm>
+          <a:off x="0" y="0"/>
+          <a:ext cx="0" cy="0"/>
+          <a:chOff x="0" y="0"/>
+          <a:chExt cx="0" cy="0"/>
+        </a:xfrm>
+      </p:grpSpPr>
+      <p:sp>
+        <p:nvSpPr>
+          <p:cNvPr id="2" name="Title 1">
+            <a:extLst>
+              <a:ext uri="{FF2B5EF4-FFF2-40B4-BE49-F238E27FC236}">
                 <a16:creationId xmlns:a16="http://schemas.microsoft.com/office/drawing/2014/main" id="{3CB4D42A-31FF-2233-C65B-58633072E3E1}"/>
               </a:ext>
             </a:extLst>
@@ -22397,7 +22636,7 @@
           <a:p>
             <a:fld id="{53F8AFFE-7D21-49C3-A787-D64AF1905E62}" type="datetime1">
               <a:rPr lang="en-US" smtClean="0"/>
-              <a:t>8/10/2026</a:t>
+              <a:t>8/14/2026</a:t>
             </a:fld>
             <a:endParaRPr lang="en-US" dirty="0"/>
           </a:p>
@@ -22455,7 +22694,7 @@
           <a:p>
             <a:fld id="{4FAB73BC-B049-4115-A692-8D63A059BFB8}" type="slidenum">
               <a:rPr lang="en-US" smtClean="0"/>
-              <a:t>14</a:t>
+              <a:t>15</a:t>
             </a:fld>
             <a:endParaRPr lang="en-US" dirty="0"/>
           </a:p>
@@ -22539,7 +22778,507 @@
 </p:sld>
 </file>
 
-<file path=ppt/slides/slide15.xml><?xml version="1.0" encoding="utf-8"?>
+<file path=ppt/slides/slide16.xml><?xml version="1.0" encoding="utf-8"?>
+<p:sld xmlns:a="http://schemas.openxmlformats.org/drawingml/2006/main" xmlns:r="http://schemas.openxmlformats.org/officeDocument/2006/relationships" xmlns:p="http://schemas.openxmlformats.org/presentationml/2006/main">
+  <p:cSld>
+    <p:spTree>
+      <p:nvGrpSpPr>
+        <p:cNvPr id="1" name=""/>
+        <p:cNvGrpSpPr/>
+        <p:nvPr/>
+      </p:nvGrpSpPr>
+      <p:grpSpPr>
+        <a:xfrm>
+          <a:off x="0" y="0"/>
+          <a:ext cx="0" cy="0"/>
+          <a:chOff x="0" y="0"/>
+          <a:chExt cx="0" cy="0"/>
+        </a:xfrm>
+      </p:grpSpPr>
+      <p:sp>
+        <p:nvSpPr>
+          <p:cNvPr id="2" name="Title 1">
+            <a:extLst>
+              <a:ext uri="{FF2B5EF4-FFF2-40B4-BE49-F238E27FC236}">
+                <a16:creationId xmlns:a16="http://schemas.microsoft.com/office/drawing/2014/main" id="{F0D619D3-9BEE-1866-5655-3CD245D56CB2}"/>
+              </a:ext>
+            </a:extLst>
+          </p:cNvPr>
+          <p:cNvSpPr>
+            <a:spLocks noGrp="1"/>
+          </p:cNvSpPr>
+          <p:nvPr>
+            <p:ph type="title"/>
+          </p:nvPr>
+        </p:nvSpPr>
+        <p:spPr/>
+        <p:txBody>
+          <a:bodyPr/>
+          <a:lstStyle/>
+          <a:p>
+            <a:r>
+              <a:rPr lang="en-SG" dirty="0"/>
+              <a:t>Confusion Matrix Analysis</a:t>
+            </a:r>
+          </a:p>
+        </p:txBody>
+      </p:sp>
+      <p:sp>
+        <p:nvSpPr>
+          <p:cNvPr id="4" name="Date Placeholder 3">
+            <a:extLst>
+              <a:ext uri="{FF2B5EF4-FFF2-40B4-BE49-F238E27FC236}">
+                <a16:creationId xmlns:a16="http://schemas.microsoft.com/office/drawing/2014/main" id="{9071DE05-0ACE-36BB-11BE-6FE9138020BB}"/>
+              </a:ext>
+            </a:extLst>
+          </p:cNvPr>
+          <p:cNvSpPr>
+            <a:spLocks noGrp="1"/>
+          </p:cNvSpPr>
+          <p:nvPr>
+            <p:ph type="dt" sz="half" idx="10"/>
+          </p:nvPr>
+        </p:nvSpPr>
+        <p:spPr/>
+        <p:txBody>
+          <a:bodyPr/>
+          <a:lstStyle/>
+          <a:p>
+            <a:fld id="{53F8AFFE-7D21-49C3-A787-D64AF1905E62}" type="datetime1">
+              <a:rPr lang="en-US" smtClean="0"/>
+              <a:t>8/14/2026</a:t>
+            </a:fld>
+            <a:endParaRPr lang="en-US" dirty="0"/>
+          </a:p>
+        </p:txBody>
+      </p:sp>
+      <p:sp>
+        <p:nvSpPr>
+          <p:cNvPr id="5" name="Footer Placeholder 4">
+            <a:extLst>
+              <a:ext uri="{FF2B5EF4-FFF2-40B4-BE49-F238E27FC236}">
+                <a16:creationId xmlns:a16="http://schemas.microsoft.com/office/drawing/2014/main" id="{22C030F4-33CD-6346-A921-B266AABDF944}"/>
+              </a:ext>
+            </a:extLst>
+          </p:cNvPr>
+          <p:cNvSpPr>
+            <a:spLocks noGrp="1"/>
+          </p:cNvSpPr>
+          <p:nvPr>
+            <p:ph type="ftr" sz="quarter" idx="11"/>
+          </p:nvPr>
+        </p:nvSpPr>
+        <p:spPr/>
+        <p:txBody>
+          <a:bodyPr/>
+          <a:lstStyle/>
+          <a:p>
+            <a:r>
+              <a:rPr lang="en-US"/>
+              <a:t>SDAAI/Final Presentation/Capstone Project 2021</a:t>
+            </a:r>
+            <a:endParaRPr lang="en-US" dirty="0"/>
+          </a:p>
+        </p:txBody>
+      </p:sp>
+      <p:sp>
+        <p:nvSpPr>
+          <p:cNvPr id="6" name="Slide Number Placeholder 5">
+            <a:extLst>
+              <a:ext uri="{FF2B5EF4-FFF2-40B4-BE49-F238E27FC236}">
+                <a16:creationId xmlns:a16="http://schemas.microsoft.com/office/drawing/2014/main" id="{3F9EFAD1-5089-4B19-C05D-8DF5B2922686}"/>
+              </a:ext>
+            </a:extLst>
+          </p:cNvPr>
+          <p:cNvSpPr>
+            <a:spLocks noGrp="1"/>
+          </p:cNvSpPr>
+          <p:nvPr>
+            <p:ph type="sldNum" sz="quarter" idx="12"/>
+          </p:nvPr>
+        </p:nvSpPr>
+        <p:spPr/>
+        <p:txBody>
+          <a:bodyPr/>
+          <a:lstStyle/>
+          <a:p>
+            <a:fld id="{4FAB73BC-B049-4115-A692-8D63A059BFB8}" type="slidenum">
+              <a:rPr lang="en-US" smtClean="0"/>
+              <a:t>16</a:t>
+            </a:fld>
+            <a:endParaRPr lang="en-US" dirty="0"/>
+          </a:p>
+        </p:txBody>
+      </p:sp>
+      <p:pic>
+        <p:nvPicPr>
+          <p:cNvPr id="8" name="Picture 7">
+            <a:extLst>
+              <a:ext uri="{FF2B5EF4-FFF2-40B4-BE49-F238E27FC236}">
+                <a16:creationId xmlns:a16="http://schemas.microsoft.com/office/drawing/2014/main" id="{483CEEF3-1A80-26DB-DF65-300C080FF904}"/>
+              </a:ext>
+            </a:extLst>
+          </p:cNvPr>
+          <p:cNvPicPr>
+            <a:picLocks noChangeAspect="1"/>
+          </p:cNvPicPr>
+          <p:nvPr/>
+        </p:nvPicPr>
+        <p:blipFill>
+          <a:blip r:embed="rId2"/>
+          <a:stretch>
+            <a:fillRect/>
+          </a:stretch>
+        </p:blipFill>
+        <p:spPr>
+          <a:xfrm>
+            <a:off x="155412" y="1814453"/>
+            <a:ext cx="3019870" cy="2264903"/>
+          </a:xfrm>
+          <a:prstGeom prst="rect">
+            <a:avLst/>
+          </a:prstGeom>
+        </p:spPr>
+      </p:pic>
+      <p:pic>
+        <p:nvPicPr>
+          <p:cNvPr id="10" name="Picture 9">
+            <a:extLst>
+              <a:ext uri="{FF2B5EF4-FFF2-40B4-BE49-F238E27FC236}">
+                <a16:creationId xmlns:a16="http://schemas.microsoft.com/office/drawing/2014/main" id="{CBC4A65E-0844-A34A-F522-70B27D511729}"/>
+              </a:ext>
+            </a:extLst>
+          </p:cNvPr>
+          <p:cNvPicPr>
+            <a:picLocks noChangeAspect="1"/>
+          </p:cNvPicPr>
+          <p:nvPr/>
+        </p:nvPicPr>
+        <p:blipFill>
+          <a:blip r:embed="rId3"/>
+          <a:stretch>
+            <a:fillRect/>
+          </a:stretch>
+        </p:blipFill>
+        <p:spPr>
+          <a:xfrm>
+            <a:off x="3079282" y="1814452"/>
+            <a:ext cx="3111390" cy="2333543"/>
+          </a:xfrm>
+          <a:prstGeom prst="rect">
+            <a:avLst/>
+          </a:prstGeom>
+        </p:spPr>
+      </p:pic>
+      <p:pic>
+        <p:nvPicPr>
+          <p:cNvPr id="12" name="Picture 11">
+            <a:extLst>
+              <a:ext uri="{FF2B5EF4-FFF2-40B4-BE49-F238E27FC236}">
+                <a16:creationId xmlns:a16="http://schemas.microsoft.com/office/drawing/2014/main" id="{5361353F-EDFC-B635-2ECB-16DF5475007C}"/>
+              </a:ext>
+            </a:extLst>
+          </p:cNvPr>
+          <p:cNvPicPr>
+            <a:picLocks noChangeAspect="1"/>
+          </p:cNvPicPr>
+          <p:nvPr/>
+        </p:nvPicPr>
+        <p:blipFill>
+          <a:blip r:embed="rId4"/>
+          <a:stretch>
+            <a:fillRect/>
+          </a:stretch>
+        </p:blipFill>
+        <p:spPr>
+          <a:xfrm>
+            <a:off x="6069008" y="1848771"/>
+            <a:ext cx="3019870" cy="2264903"/>
+          </a:xfrm>
+          <a:prstGeom prst="rect">
+            <a:avLst/>
+          </a:prstGeom>
+        </p:spPr>
+      </p:pic>
+      <p:pic>
+        <p:nvPicPr>
+          <p:cNvPr id="14" name="Picture 13">
+            <a:extLst>
+              <a:ext uri="{FF2B5EF4-FFF2-40B4-BE49-F238E27FC236}">
+                <a16:creationId xmlns:a16="http://schemas.microsoft.com/office/drawing/2014/main" id="{4056A862-94EE-2DDF-B719-3FAB7282A93E}"/>
+              </a:ext>
+            </a:extLst>
+          </p:cNvPr>
+          <p:cNvPicPr>
+            <a:picLocks noChangeAspect="1"/>
+          </p:cNvPicPr>
+          <p:nvPr/>
+        </p:nvPicPr>
+        <p:blipFill>
+          <a:blip r:embed="rId5"/>
+          <a:stretch>
+            <a:fillRect/>
+          </a:stretch>
+        </p:blipFill>
+        <p:spPr>
+          <a:xfrm>
+            <a:off x="8949983" y="1814450"/>
+            <a:ext cx="3111391" cy="2333543"/>
+          </a:xfrm>
+          <a:prstGeom prst="rect">
+            <a:avLst/>
+          </a:prstGeom>
+        </p:spPr>
+      </p:pic>
+      <p:pic>
+        <p:nvPicPr>
+          <p:cNvPr id="16" name="Picture 15">
+            <a:extLst>
+              <a:ext uri="{FF2B5EF4-FFF2-40B4-BE49-F238E27FC236}">
+                <a16:creationId xmlns:a16="http://schemas.microsoft.com/office/drawing/2014/main" id="{2305B346-B829-A47A-072B-8A3A4121D80B}"/>
+              </a:ext>
+            </a:extLst>
+          </p:cNvPr>
+          <p:cNvPicPr>
+            <a:picLocks noChangeAspect="1"/>
+          </p:cNvPicPr>
+          <p:nvPr/>
+        </p:nvPicPr>
+        <p:blipFill>
+          <a:blip r:embed="rId6"/>
+          <a:stretch>
+            <a:fillRect/>
+          </a:stretch>
+        </p:blipFill>
+        <p:spPr>
+          <a:xfrm>
+            <a:off x="2675380" y="4229845"/>
+            <a:ext cx="3079331" cy="2309498"/>
+          </a:xfrm>
+          <a:prstGeom prst="rect">
+            <a:avLst/>
+          </a:prstGeom>
+        </p:spPr>
+      </p:pic>
+      <p:pic>
+        <p:nvPicPr>
+          <p:cNvPr id="18" name="Picture 17">
+            <a:extLst>
+              <a:ext uri="{FF2B5EF4-FFF2-40B4-BE49-F238E27FC236}">
+                <a16:creationId xmlns:a16="http://schemas.microsoft.com/office/drawing/2014/main" id="{C71B2C4B-20BF-BB22-3D46-6D90B4D140DB}"/>
+              </a:ext>
+            </a:extLst>
+          </p:cNvPr>
+          <p:cNvPicPr>
+            <a:picLocks noChangeAspect="1"/>
+          </p:cNvPicPr>
+          <p:nvPr/>
+        </p:nvPicPr>
+        <p:blipFill>
+          <a:blip r:embed="rId7"/>
+          <a:stretch>
+            <a:fillRect/>
+          </a:stretch>
+        </p:blipFill>
+        <p:spPr>
+          <a:xfrm>
+            <a:off x="5884164" y="4291373"/>
+            <a:ext cx="2951536" cy="2213652"/>
+          </a:xfrm>
+          <a:prstGeom prst="rect">
+            <a:avLst/>
+          </a:prstGeom>
+        </p:spPr>
+      </p:pic>
+    </p:spTree>
+    <p:extLst>
+      <p:ext uri="{BB962C8B-B14F-4D97-AF65-F5344CB8AC3E}">
+        <p14:creationId xmlns:p14="http://schemas.microsoft.com/office/powerpoint/2010/main" val="597720471"/>
+      </p:ext>
+    </p:extLst>
+  </p:cSld>
+  <p:clrMapOvr>
+    <a:masterClrMapping/>
+  </p:clrMapOvr>
+</p:sld>
+</file>
+
+<file path=ppt/slides/slide17.xml><?xml version="1.0" encoding="utf-8"?>
+<p:sld xmlns:a="http://schemas.openxmlformats.org/drawingml/2006/main" xmlns:r="http://schemas.openxmlformats.org/officeDocument/2006/relationships" xmlns:p="http://schemas.openxmlformats.org/presentationml/2006/main">
+  <p:cSld>
+    <p:spTree>
+      <p:nvGrpSpPr>
+        <p:cNvPr id="1" name=""/>
+        <p:cNvGrpSpPr/>
+        <p:nvPr/>
+      </p:nvGrpSpPr>
+      <p:grpSpPr>
+        <a:xfrm>
+          <a:off x="0" y="0"/>
+          <a:ext cx="0" cy="0"/>
+          <a:chOff x="0" y="0"/>
+          <a:chExt cx="0" cy="0"/>
+        </a:xfrm>
+      </p:grpSpPr>
+      <p:sp>
+        <p:nvSpPr>
+          <p:cNvPr id="2" name="Title 1">
+            <a:extLst>
+              <a:ext uri="{FF2B5EF4-FFF2-40B4-BE49-F238E27FC236}">
+                <a16:creationId xmlns:a16="http://schemas.microsoft.com/office/drawing/2014/main" id="{FC48808C-3F24-D677-2976-A77EEBD8B9DB}"/>
+              </a:ext>
+            </a:extLst>
+          </p:cNvPr>
+          <p:cNvSpPr>
+            <a:spLocks noGrp="1"/>
+          </p:cNvSpPr>
+          <p:nvPr>
+            <p:ph type="title"/>
+          </p:nvPr>
+        </p:nvSpPr>
+        <p:spPr/>
+        <p:txBody>
+          <a:bodyPr/>
+          <a:lstStyle/>
+          <a:p>
+            <a:r>
+              <a:rPr lang="en-SG" dirty="0"/>
+              <a:t>Feature Importances of Best Model</a:t>
+            </a:r>
+          </a:p>
+        </p:txBody>
+      </p:sp>
+      <p:sp>
+        <p:nvSpPr>
+          <p:cNvPr id="4" name="Date Placeholder 3">
+            <a:extLst>
+              <a:ext uri="{FF2B5EF4-FFF2-40B4-BE49-F238E27FC236}">
+                <a16:creationId xmlns:a16="http://schemas.microsoft.com/office/drawing/2014/main" id="{2A836F89-7494-C2EC-BD2B-934AF4045A4B}"/>
+              </a:ext>
+            </a:extLst>
+          </p:cNvPr>
+          <p:cNvSpPr>
+            <a:spLocks noGrp="1"/>
+          </p:cNvSpPr>
+          <p:nvPr>
+            <p:ph type="dt" sz="half" idx="10"/>
+          </p:nvPr>
+        </p:nvSpPr>
+        <p:spPr/>
+        <p:txBody>
+          <a:bodyPr/>
+          <a:lstStyle/>
+          <a:p>
+            <a:fld id="{53F8AFFE-7D21-49C3-A787-D64AF1905E62}" type="datetime1">
+              <a:rPr lang="en-US" smtClean="0"/>
+              <a:t>8/14/2026</a:t>
+            </a:fld>
+            <a:endParaRPr lang="en-US" dirty="0"/>
+          </a:p>
+        </p:txBody>
+      </p:sp>
+      <p:sp>
+        <p:nvSpPr>
+          <p:cNvPr id="5" name="Footer Placeholder 4">
+            <a:extLst>
+              <a:ext uri="{FF2B5EF4-FFF2-40B4-BE49-F238E27FC236}">
+                <a16:creationId xmlns:a16="http://schemas.microsoft.com/office/drawing/2014/main" id="{2166F2BD-B745-58C7-E5C9-BC5E39F7DE10}"/>
+              </a:ext>
+            </a:extLst>
+          </p:cNvPr>
+          <p:cNvSpPr>
+            <a:spLocks noGrp="1"/>
+          </p:cNvSpPr>
+          <p:nvPr>
+            <p:ph type="ftr" sz="quarter" idx="11"/>
+          </p:nvPr>
+        </p:nvSpPr>
+        <p:spPr/>
+        <p:txBody>
+          <a:bodyPr/>
+          <a:lstStyle/>
+          <a:p>
+            <a:r>
+              <a:rPr lang="en-US"/>
+              <a:t>SDAAI/Final Presentation/Capstone Project 2021</a:t>
+            </a:r>
+            <a:endParaRPr lang="en-US" dirty="0"/>
+          </a:p>
+        </p:txBody>
+      </p:sp>
+      <p:sp>
+        <p:nvSpPr>
+          <p:cNvPr id="6" name="Slide Number Placeholder 5">
+            <a:extLst>
+              <a:ext uri="{FF2B5EF4-FFF2-40B4-BE49-F238E27FC236}">
+                <a16:creationId xmlns:a16="http://schemas.microsoft.com/office/drawing/2014/main" id="{F2595355-37AA-97C7-3AEA-39177FF39D80}"/>
+              </a:ext>
+            </a:extLst>
+          </p:cNvPr>
+          <p:cNvSpPr>
+            <a:spLocks noGrp="1"/>
+          </p:cNvSpPr>
+          <p:nvPr>
+            <p:ph type="sldNum" sz="quarter" idx="12"/>
+          </p:nvPr>
+        </p:nvSpPr>
+        <p:spPr/>
+        <p:txBody>
+          <a:bodyPr/>
+          <a:lstStyle/>
+          <a:p>
+            <a:fld id="{4FAB73BC-B049-4115-A692-8D63A059BFB8}" type="slidenum">
+              <a:rPr lang="en-US" smtClean="0"/>
+              <a:t>17</a:t>
+            </a:fld>
+            <a:endParaRPr lang="en-US" dirty="0"/>
+          </a:p>
+        </p:txBody>
+      </p:sp>
+      <p:pic>
+        <p:nvPicPr>
+          <p:cNvPr id="8" name="Picture 7">
+            <a:extLst>
+              <a:ext uri="{FF2B5EF4-FFF2-40B4-BE49-F238E27FC236}">
+                <a16:creationId xmlns:a16="http://schemas.microsoft.com/office/drawing/2014/main" id="{5B554924-D087-B029-9DF5-66EEF193C20F}"/>
+              </a:ext>
+            </a:extLst>
+          </p:cNvPr>
+          <p:cNvPicPr>
+            <a:picLocks noChangeAspect="1"/>
+          </p:cNvPicPr>
+          <p:nvPr/>
+        </p:nvPicPr>
+        <p:blipFill>
+          <a:blip r:embed="rId2"/>
+          <a:stretch>
+            <a:fillRect/>
+          </a:stretch>
+        </p:blipFill>
+        <p:spPr>
+          <a:xfrm>
+            <a:off x="3059382" y="1736853"/>
+            <a:ext cx="5852172" cy="4389129"/>
+          </a:xfrm>
+          <a:prstGeom prst="rect">
+            <a:avLst/>
+          </a:prstGeom>
+        </p:spPr>
+      </p:pic>
+    </p:spTree>
+    <p:extLst>
+      <p:ext uri="{BB962C8B-B14F-4D97-AF65-F5344CB8AC3E}">
+        <p14:creationId xmlns:p14="http://schemas.microsoft.com/office/powerpoint/2010/main" val="1634394721"/>
+      </p:ext>
+    </p:extLst>
+  </p:cSld>
+  <p:clrMapOvr>
+    <a:masterClrMapping/>
+  </p:clrMapOvr>
+</p:sld>
+</file>
+
+<file path=ppt/slides/slide18.xml><?xml version="1.0" encoding="utf-8"?>
 <p:sld xmlns:a="http://schemas.openxmlformats.org/drawingml/2006/main" xmlns:r="http://schemas.openxmlformats.org/officeDocument/2006/relationships" xmlns:p="http://schemas.openxmlformats.org/presentationml/2006/main">
   <p:cSld>
     <p:spTree>
@@ -22607,7 +23346,7 @@
           <a:p>
             <a:fld id="{53F8AFFE-7D21-49C3-A787-D64AF1905E62}" type="datetime1">
               <a:rPr lang="en-US" smtClean="0"/>
-              <a:t>8/10/2026</a:t>
+              <a:t>8/14/2026</a:t>
             </a:fld>
             <a:endParaRPr lang="en-US" dirty="0"/>
           </a:p>
@@ -22665,7 +23404,7 @@
           <a:p>
             <a:fld id="{4FAB73BC-B049-4115-A692-8D63A059BFB8}" type="slidenum">
               <a:rPr lang="en-US" smtClean="0"/>
-              <a:t>15</a:t>
+              <a:t>18</a:t>
             </a:fld>
             <a:endParaRPr lang="en-US" dirty="0"/>
           </a:p>
@@ -22765,6 +23504,176 @@
 </p:sld>
 </file>
 
+<file path=ppt/slides/slide19.xml><?xml version="1.0" encoding="utf-8"?>
+<p:sld xmlns:a="http://schemas.openxmlformats.org/drawingml/2006/main" xmlns:r="http://schemas.openxmlformats.org/officeDocument/2006/relationships" xmlns:p="http://schemas.openxmlformats.org/presentationml/2006/main">
+  <p:cSld>
+    <p:spTree>
+      <p:nvGrpSpPr>
+        <p:cNvPr id="1" name=""/>
+        <p:cNvGrpSpPr/>
+        <p:nvPr/>
+      </p:nvGrpSpPr>
+      <p:grpSpPr>
+        <a:xfrm>
+          <a:off x="0" y="0"/>
+          <a:ext cx="0" cy="0"/>
+          <a:chOff x="0" y="0"/>
+          <a:chExt cx="0" cy="0"/>
+        </a:xfrm>
+      </p:grpSpPr>
+      <p:sp>
+        <p:nvSpPr>
+          <p:cNvPr id="7" name="Title 6">
+            <a:extLst>
+              <a:ext uri="{FF2B5EF4-FFF2-40B4-BE49-F238E27FC236}">
+                <a16:creationId xmlns:a16="http://schemas.microsoft.com/office/drawing/2014/main" id="{7B06EC76-06EB-B9B5-80A5-C0662FDFAA0E}"/>
+              </a:ext>
+            </a:extLst>
+          </p:cNvPr>
+          <p:cNvSpPr>
+            <a:spLocks noGrp="1"/>
+          </p:cNvSpPr>
+          <p:nvPr>
+            <p:ph type="title"/>
+          </p:nvPr>
+        </p:nvSpPr>
+        <p:spPr/>
+        <p:txBody>
+          <a:bodyPr/>
+          <a:lstStyle/>
+          <a:p>
+            <a:r>
+              <a:rPr lang="en-SG" dirty="0"/>
+              <a:t>Demo working implementation</a:t>
+            </a:r>
+          </a:p>
+        </p:txBody>
+      </p:sp>
+      <p:sp>
+        <p:nvSpPr>
+          <p:cNvPr id="8" name="Text Placeholder 7">
+            <a:extLst>
+              <a:ext uri="{FF2B5EF4-FFF2-40B4-BE49-F238E27FC236}">
+                <a16:creationId xmlns:a16="http://schemas.microsoft.com/office/drawing/2014/main" id="{A4504F4E-F448-D006-FC55-95A1217019A4}"/>
+              </a:ext>
+            </a:extLst>
+          </p:cNvPr>
+          <p:cNvSpPr>
+            <a:spLocks noGrp="1"/>
+          </p:cNvSpPr>
+          <p:nvPr>
+            <p:ph type="body" idx="1"/>
+          </p:nvPr>
+        </p:nvSpPr>
+        <p:spPr/>
+        <p:txBody>
+          <a:bodyPr/>
+          <a:lstStyle/>
+          <a:p>
+            <a:endParaRPr lang="en-SG"/>
+          </a:p>
+        </p:txBody>
+      </p:sp>
+      <p:sp>
+        <p:nvSpPr>
+          <p:cNvPr id="4" name="Date Placeholder 3">
+            <a:extLst>
+              <a:ext uri="{FF2B5EF4-FFF2-40B4-BE49-F238E27FC236}">
+                <a16:creationId xmlns:a16="http://schemas.microsoft.com/office/drawing/2014/main" id="{A672633C-2813-B0A6-9A09-CD50A3F6E2E7}"/>
+              </a:ext>
+            </a:extLst>
+          </p:cNvPr>
+          <p:cNvSpPr>
+            <a:spLocks noGrp="1"/>
+          </p:cNvSpPr>
+          <p:nvPr>
+            <p:ph type="dt" sz="half" idx="10"/>
+          </p:nvPr>
+        </p:nvSpPr>
+        <p:spPr/>
+        <p:txBody>
+          <a:bodyPr/>
+          <a:lstStyle/>
+          <a:p>
+            <a:fld id="{53F8AFFE-7D21-49C3-A787-D64AF1905E62}" type="datetime1">
+              <a:rPr lang="en-US" smtClean="0"/>
+              <a:t>8/14/2026</a:t>
+            </a:fld>
+            <a:endParaRPr lang="en-US" dirty="0"/>
+          </a:p>
+        </p:txBody>
+      </p:sp>
+      <p:sp>
+        <p:nvSpPr>
+          <p:cNvPr id="5" name="Footer Placeholder 4">
+            <a:extLst>
+              <a:ext uri="{FF2B5EF4-FFF2-40B4-BE49-F238E27FC236}">
+                <a16:creationId xmlns:a16="http://schemas.microsoft.com/office/drawing/2014/main" id="{FA46F89A-53A1-4633-1F90-E1D69955976E}"/>
+              </a:ext>
+            </a:extLst>
+          </p:cNvPr>
+          <p:cNvSpPr>
+            <a:spLocks noGrp="1"/>
+          </p:cNvSpPr>
+          <p:nvPr>
+            <p:ph type="ftr" sz="quarter" idx="11"/>
+          </p:nvPr>
+        </p:nvSpPr>
+        <p:spPr/>
+        <p:txBody>
+          <a:bodyPr/>
+          <a:lstStyle/>
+          <a:p>
+            <a:r>
+              <a:rPr lang="en-US"/>
+              <a:t>SDAAI/Final Presentation/Capstone Project 2021</a:t>
+            </a:r>
+            <a:endParaRPr lang="en-US" dirty="0"/>
+          </a:p>
+        </p:txBody>
+      </p:sp>
+      <p:sp>
+        <p:nvSpPr>
+          <p:cNvPr id="6" name="Slide Number Placeholder 5">
+            <a:extLst>
+              <a:ext uri="{FF2B5EF4-FFF2-40B4-BE49-F238E27FC236}">
+                <a16:creationId xmlns:a16="http://schemas.microsoft.com/office/drawing/2014/main" id="{F5C6F57F-62A4-90D5-E94F-A4A3D689E174}"/>
+              </a:ext>
+            </a:extLst>
+          </p:cNvPr>
+          <p:cNvSpPr>
+            <a:spLocks noGrp="1"/>
+          </p:cNvSpPr>
+          <p:nvPr>
+            <p:ph type="sldNum" sz="quarter" idx="12"/>
+          </p:nvPr>
+        </p:nvSpPr>
+        <p:spPr/>
+        <p:txBody>
+          <a:bodyPr/>
+          <a:lstStyle/>
+          <a:p>
+            <a:fld id="{4FAB73BC-B049-4115-A692-8D63A059BFB8}" type="slidenum">
+              <a:rPr lang="en-US" smtClean="0"/>
+              <a:t>19</a:t>
+            </a:fld>
+            <a:endParaRPr lang="en-US" dirty="0"/>
+          </a:p>
+        </p:txBody>
+      </p:sp>
+    </p:spTree>
+    <p:extLst>
+      <p:ext uri="{BB962C8B-B14F-4D97-AF65-F5344CB8AC3E}">
+        <p14:creationId xmlns:p14="http://schemas.microsoft.com/office/powerpoint/2010/main" val="508940213"/>
+      </p:ext>
+    </p:extLst>
+  </p:cSld>
+  <p:clrMapOvr>
+    <a:masterClrMapping/>
+  </p:clrMapOvr>
+</p:sld>
+</file>
+
 <file path=ppt/slides/slide2.xml><?xml version="1.0" encoding="utf-8"?>
 <p:sld xmlns:a="http://schemas.openxmlformats.org/drawingml/2006/main" xmlns:r="http://schemas.openxmlformats.org/officeDocument/2006/relationships" xmlns:p="http://schemas.openxmlformats.org/presentationml/2006/main">
   <p:cSld>
@@ -22833,7 +23742,7 @@
           <a:p>
             <a:fld id="{53F8AFFE-7D21-49C3-A787-D64AF1905E62}" type="datetime1">
               <a:rPr lang="en-US" smtClean="0"/>
-              <a:t>8/10/2026</a:t>
+              <a:t>8/14/2026</a:t>
             </a:fld>
             <a:endParaRPr lang="en-US" dirty="0"/>
           </a:p>
@@ -23043,7 +23952,7 @@
           <a:p>
             <a:fld id="{53F8AFFE-7D21-49C3-A787-D64AF1905E62}" type="datetime1">
               <a:rPr lang="en-US" smtClean="0"/>
-              <a:t>8/10/2026</a:t>
+              <a:t>8/14/2026</a:t>
             </a:fld>
             <a:endParaRPr lang="en-US" dirty="0"/>
           </a:p>
@@ -23253,7 +24162,7 @@
           <a:p>
             <a:fld id="{53F8AFFE-7D21-49C3-A787-D64AF1905E62}" type="datetime1">
               <a:rPr lang="en-US" smtClean="0"/>
-              <a:t>8/10/2026</a:t>
+              <a:t>8/14/2026</a:t>
             </a:fld>
             <a:endParaRPr lang="en-US" dirty="0"/>
           </a:p>
@@ -23463,7 +24372,7 @@
           <a:p>
             <a:fld id="{53F8AFFE-7D21-49C3-A787-D64AF1905E62}" type="datetime1">
               <a:rPr lang="en-US" smtClean="0"/>
-              <a:t>8/10/2026</a:t>
+              <a:t>8/14/2026</a:t>
             </a:fld>
             <a:endParaRPr lang="en-US" dirty="0"/>
           </a:p>
@@ -23723,7 +24632,7 @@
           <a:p>
             <a:fld id="{53F8AFFE-7D21-49C3-A787-D64AF1905E62}" type="datetime1">
               <a:rPr lang="en-US" smtClean="0"/>
-              <a:t>8/10/2026</a:t>
+              <a:t>8/14/2026</a:t>
             </a:fld>
             <a:endParaRPr lang="en-US" dirty="0"/>
           </a:p>
@@ -23787,6 +24696,216 @@
           </a:p>
         </p:txBody>
       </p:sp>
+      <p:pic>
+        <p:nvPicPr>
+          <p:cNvPr id="7" name="Picture 6">
+            <a:extLst>
+              <a:ext uri="{FF2B5EF4-FFF2-40B4-BE49-F238E27FC236}">
+                <a16:creationId xmlns:a16="http://schemas.microsoft.com/office/drawing/2014/main" id="{85447C63-68E5-308D-F6AF-E612717DF598}"/>
+              </a:ext>
+            </a:extLst>
+          </p:cNvPr>
+          <p:cNvPicPr>
+            <a:picLocks noChangeAspect="1"/>
+          </p:cNvPicPr>
+          <p:nvPr/>
+        </p:nvPicPr>
+        <p:blipFill>
+          <a:blip r:embed="rId2"/>
+          <a:stretch>
+            <a:fillRect/>
+          </a:stretch>
+        </p:blipFill>
+        <p:spPr>
+          <a:xfrm>
+            <a:off x="481824" y="2040114"/>
+            <a:ext cx="3503884" cy="1751942"/>
+          </a:xfrm>
+          <a:prstGeom prst="rect">
+            <a:avLst/>
+          </a:prstGeom>
+        </p:spPr>
+      </p:pic>
+      <p:pic>
+        <p:nvPicPr>
+          <p:cNvPr id="9" name="Picture 8">
+            <a:extLst>
+              <a:ext uri="{FF2B5EF4-FFF2-40B4-BE49-F238E27FC236}">
+                <a16:creationId xmlns:a16="http://schemas.microsoft.com/office/drawing/2014/main" id="{B0A9CEE7-9FD0-95A7-9246-333832F49855}"/>
+              </a:ext>
+            </a:extLst>
+          </p:cNvPr>
+          <p:cNvPicPr>
+            <a:picLocks noChangeAspect="1"/>
+          </p:cNvPicPr>
+          <p:nvPr/>
+        </p:nvPicPr>
+        <p:blipFill>
+          <a:blip r:embed="rId3"/>
+          <a:stretch>
+            <a:fillRect/>
+          </a:stretch>
+        </p:blipFill>
+        <p:spPr>
+          <a:xfrm>
+            <a:off x="9216511" y="4123265"/>
+            <a:ext cx="2926085" cy="2194564"/>
+          </a:xfrm>
+          <a:prstGeom prst="rect">
+            <a:avLst/>
+          </a:prstGeom>
+        </p:spPr>
+      </p:pic>
+      <p:pic>
+        <p:nvPicPr>
+          <p:cNvPr id="11" name="Picture 10">
+            <a:extLst>
+              <a:ext uri="{FF2B5EF4-FFF2-40B4-BE49-F238E27FC236}">
+                <a16:creationId xmlns:a16="http://schemas.microsoft.com/office/drawing/2014/main" id="{61460904-82AF-EAA3-EC60-7A060BD8D416}"/>
+              </a:ext>
+            </a:extLst>
+          </p:cNvPr>
+          <p:cNvPicPr>
+            <a:picLocks noChangeAspect="1"/>
+          </p:cNvPicPr>
+          <p:nvPr/>
+        </p:nvPicPr>
+        <p:blipFill>
+          <a:blip r:embed="rId4"/>
+          <a:stretch>
+            <a:fillRect/>
+          </a:stretch>
+        </p:blipFill>
+        <p:spPr>
+          <a:xfrm>
+            <a:off x="7555021" y="1775826"/>
+            <a:ext cx="4389128" cy="2194564"/>
+          </a:xfrm>
+          <a:prstGeom prst="rect">
+            <a:avLst/>
+          </a:prstGeom>
+        </p:spPr>
+      </p:pic>
+      <p:pic>
+        <p:nvPicPr>
+          <p:cNvPr id="13" name="Picture 12">
+            <a:extLst>
+              <a:ext uri="{FF2B5EF4-FFF2-40B4-BE49-F238E27FC236}">
+                <a16:creationId xmlns:a16="http://schemas.microsoft.com/office/drawing/2014/main" id="{12FFC77F-6A9A-9055-B814-DC98642F1C52}"/>
+              </a:ext>
+            </a:extLst>
+          </p:cNvPr>
+          <p:cNvPicPr>
+            <a:picLocks noChangeAspect="1"/>
+          </p:cNvPicPr>
+          <p:nvPr/>
+        </p:nvPicPr>
+        <p:blipFill>
+          <a:blip r:embed="rId5"/>
+          <a:stretch>
+            <a:fillRect/>
+          </a:stretch>
+        </p:blipFill>
+        <p:spPr>
+          <a:xfrm>
+            <a:off x="216692" y="4189126"/>
+            <a:ext cx="3769016" cy="1884508"/>
+          </a:xfrm>
+          <a:prstGeom prst="rect">
+            <a:avLst/>
+          </a:prstGeom>
+        </p:spPr>
+      </p:pic>
+      <p:pic>
+        <p:nvPicPr>
+          <p:cNvPr id="15" name="Picture 14">
+            <a:extLst>
+              <a:ext uri="{FF2B5EF4-FFF2-40B4-BE49-F238E27FC236}">
+                <a16:creationId xmlns:a16="http://schemas.microsoft.com/office/drawing/2014/main" id="{DDD5C8E3-FB54-709C-C268-DF9111723C83}"/>
+              </a:ext>
+            </a:extLst>
+          </p:cNvPr>
+          <p:cNvPicPr>
+            <a:picLocks noChangeAspect="1"/>
+          </p:cNvPicPr>
+          <p:nvPr/>
+        </p:nvPicPr>
+        <p:blipFill>
+          <a:blip r:embed="rId6"/>
+          <a:stretch>
+            <a:fillRect/>
+          </a:stretch>
+        </p:blipFill>
+        <p:spPr>
+          <a:xfrm>
+            <a:off x="3746179" y="4034098"/>
+            <a:ext cx="2926085" cy="2194564"/>
+          </a:xfrm>
+          <a:prstGeom prst="rect">
+            <a:avLst/>
+          </a:prstGeom>
+        </p:spPr>
+      </p:pic>
+      <p:pic>
+        <p:nvPicPr>
+          <p:cNvPr id="17" name="Picture 16">
+            <a:extLst>
+              <a:ext uri="{FF2B5EF4-FFF2-40B4-BE49-F238E27FC236}">
+                <a16:creationId xmlns:a16="http://schemas.microsoft.com/office/drawing/2014/main" id="{44B68366-5CB4-B715-90A5-F4FC338EFDD4}"/>
+              </a:ext>
+            </a:extLst>
+          </p:cNvPr>
+          <p:cNvPicPr>
+            <a:picLocks noChangeAspect="1"/>
+          </p:cNvPicPr>
+          <p:nvPr/>
+        </p:nvPicPr>
+        <p:blipFill>
+          <a:blip r:embed="rId7"/>
+          <a:stretch>
+            <a:fillRect/>
+          </a:stretch>
+        </p:blipFill>
+        <p:spPr>
+          <a:xfrm>
+            <a:off x="6441153" y="4047904"/>
+            <a:ext cx="2926084" cy="2194563"/>
+          </a:xfrm>
+          <a:prstGeom prst="rect">
+            <a:avLst/>
+          </a:prstGeom>
+        </p:spPr>
+      </p:pic>
+      <p:pic>
+        <p:nvPicPr>
+          <p:cNvPr id="19" name="Picture 18">
+            <a:extLst>
+              <a:ext uri="{FF2B5EF4-FFF2-40B4-BE49-F238E27FC236}">
+                <a16:creationId xmlns:a16="http://schemas.microsoft.com/office/drawing/2014/main" id="{5320D530-A0DD-1AE4-1D58-A0A6E9B9650D}"/>
+              </a:ext>
+            </a:extLst>
+          </p:cNvPr>
+          <p:cNvPicPr>
+            <a:picLocks noChangeAspect="1"/>
+          </p:cNvPicPr>
+          <p:nvPr/>
+        </p:nvPicPr>
+        <p:blipFill>
+          <a:blip r:embed="rId8"/>
+          <a:stretch>
+            <a:fillRect/>
+          </a:stretch>
+        </p:blipFill>
+        <p:spPr>
+          <a:xfrm>
+            <a:off x="3836613" y="1997539"/>
+            <a:ext cx="3790674" cy="1895337"/>
+          </a:xfrm>
+          <a:prstGeom prst="rect">
+            <a:avLst/>
+          </a:prstGeom>
+        </p:spPr>
+      </p:pic>
     </p:spTree>
     <p:extLst>
       <p:ext uri="{BB962C8B-B14F-4D97-AF65-F5344CB8AC3E}">
@@ -23868,7 +24987,7 @@
           <a:p>
             <a:fld id="{53F8AFFE-7D21-49C3-A787-D64AF1905E62}" type="datetime1">
               <a:rPr lang="en-US" smtClean="0"/>
-              <a:t>8/10/2026</a:t>
+              <a:t>8/14/2026</a:t>
             </a:fld>
             <a:endParaRPr lang="en-US" dirty="0"/>
           </a:p>
@@ -24078,7 +25197,7 @@
           <a:p>
             <a:fld id="{53F8AFFE-7D21-49C3-A787-D64AF1905E62}" type="datetime1">
               <a:rPr lang="en-US" smtClean="0"/>
-              <a:t>8/10/2026</a:t>
+              <a:t>8/14/2026</a:t>
             </a:fld>
             <a:endParaRPr lang="en-US" dirty="0"/>
           </a:p>
@@ -24206,6 +25325,36 @@
           </a:p>
         </p:txBody>
       </p:sp>
+      <p:pic>
+        <p:nvPicPr>
+          <p:cNvPr id="7" name="Picture 6">
+            <a:extLst>
+              <a:ext uri="{FF2B5EF4-FFF2-40B4-BE49-F238E27FC236}">
+                <a16:creationId xmlns:a16="http://schemas.microsoft.com/office/drawing/2014/main" id="{B7DEBE63-2210-B499-65A9-0EC0A067CB8B}"/>
+              </a:ext>
+            </a:extLst>
+          </p:cNvPr>
+          <p:cNvPicPr>
+            <a:picLocks noChangeAspect="1"/>
+          </p:cNvPicPr>
+          <p:nvPr/>
+        </p:nvPicPr>
+        <p:blipFill>
+          <a:blip r:embed="rId3"/>
+          <a:stretch>
+            <a:fillRect/>
+          </a:stretch>
+        </p:blipFill>
+        <p:spPr>
+          <a:xfrm>
+            <a:off x="8008636" y="1957770"/>
+            <a:ext cx="3525537" cy="2644153"/>
+          </a:xfrm>
+          <a:prstGeom prst="rect">
+            <a:avLst/>
+          </a:prstGeom>
+        </p:spPr>
+      </p:pic>
     </p:spTree>
     <p:extLst>
       <p:ext uri="{BB962C8B-B14F-4D97-AF65-F5344CB8AC3E}">
@@ -24287,7 +25436,7 @@
           <a:p>
             <a:fld id="{53F8AFFE-7D21-49C3-A787-D64AF1905E62}" type="datetime1">
               <a:rPr lang="en-US" smtClean="0"/>
-              <a:t>8/10/2026</a:t>
+              <a:t>8/14/2026</a:t>
             </a:fld>
             <a:endParaRPr lang="en-US" dirty="0"/>
           </a:p>
@@ -24416,6 +25565,36 @@
           </a:p>
         </p:txBody>
       </p:sp>
+      <p:pic>
+        <p:nvPicPr>
+          <p:cNvPr id="7" name="Picture 6">
+            <a:extLst>
+              <a:ext uri="{FF2B5EF4-FFF2-40B4-BE49-F238E27FC236}">
+                <a16:creationId xmlns:a16="http://schemas.microsoft.com/office/drawing/2014/main" id="{80DAEFE5-76CE-1387-6973-6C9667F3FA82}"/>
+              </a:ext>
+            </a:extLst>
+          </p:cNvPr>
+          <p:cNvPicPr>
+            <a:picLocks noChangeAspect="1"/>
+          </p:cNvPicPr>
+          <p:nvPr/>
+        </p:nvPicPr>
+        <p:blipFill>
+          <a:blip r:embed="rId3"/>
+          <a:stretch>
+            <a:fillRect/>
+          </a:stretch>
+        </p:blipFill>
+        <p:spPr>
+          <a:xfrm>
+            <a:off x="7878007" y="1910980"/>
+            <a:ext cx="3525537" cy="2644153"/>
+          </a:xfrm>
+          <a:prstGeom prst="rect">
+            <a:avLst/>
+          </a:prstGeom>
+        </p:spPr>
+      </p:pic>
     </p:spTree>
     <p:extLst>
       <p:ext uri="{BB962C8B-B14F-4D97-AF65-F5344CB8AC3E}">
@@ -24993,20 +26172,20 @@
 </file>
 
 <file path=customXml/item1.xml><?xml version="1.0" encoding="utf-8"?>
-<p:properties xmlns:p="http://schemas.microsoft.com/office/2006/metadata/properties" xmlns:xsi="http://www.w3.org/2001/XMLSchema-instance" xmlns:pc="http://schemas.microsoft.com/office/infopath/2007/PartnerControls">
-  <documentManagement>
-    <MediaServiceKeyPoints xmlns="71af3243-3dd4-4a8d-8c0d-dd76da1f02a5" xsi:nil="true"/>
-  </documentManagement>
-</p:properties>
-</file>
-
-<file path=customXml/item2.xml><?xml version="1.0" encoding="utf-8"?>
 <?mso-contentType ?>
 <FormTemplates xmlns="http://schemas.microsoft.com/sharepoint/v3/contenttype/forms">
   <Display>DocumentLibraryForm</Display>
   <Edit>DocumentLibraryForm</Edit>
   <New>DocumentLibraryForm</New>
 </FormTemplates>
+</file>
+
+<file path=customXml/item2.xml><?xml version="1.0" encoding="utf-8"?>
+<p:properties xmlns:p="http://schemas.microsoft.com/office/2006/metadata/properties" xmlns:xsi="http://www.w3.org/2001/XMLSchema-instance" xmlns:pc="http://schemas.microsoft.com/office/infopath/2007/PartnerControls">
+  <documentManagement>
+    <MediaServiceKeyPoints xmlns="71af3243-3dd4-4a8d-8c0d-dd76da1f02a5" xsi:nil="true"/>
+  </documentManagement>
+</p:properties>
 </file>
 
 <file path=customXml/item3.xml><?xml version="1.0" encoding="utf-8"?>
@@ -25221,19 +26400,19 @@
 </file>
 
 <file path=customXml/itemProps1.xml><?xml version="1.0" encoding="utf-8"?>
+<ds:datastoreItem xmlns:ds="http://schemas.openxmlformats.org/officeDocument/2006/customXml" ds:itemID="{4F44C90D-2A62-4985-9618-3460247437B1}">
+  <ds:schemaRefs>
+    <ds:schemaRef ds:uri="http://schemas.microsoft.com/sharepoint/v3/contenttype/forms"/>
+  </ds:schemaRefs>
+</ds:datastoreItem>
+</file>
+
+<file path=customXml/itemProps2.xml><?xml version="1.0" encoding="utf-8"?>
 <ds:datastoreItem xmlns:ds="http://schemas.openxmlformats.org/officeDocument/2006/customXml" ds:itemID="{788A2F88-55C5-4ED1-9541-807C65424763}">
   <ds:schemaRefs>
     <ds:schemaRef ds:uri="http://schemas.microsoft.com/office/2006/metadata/properties"/>
     <ds:schemaRef ds:uri="http://schemas.microsoft.com/office/infopath/2007/PartnerControls"/>
     <ds:schemaRef ds:uri="71af3243-3dd4-4a8d-8c0d-dd76da1f02a5"/>
-  </ds:schemaRefs>
-</ds:datastoreItem>
-</file>
-
-<file path=customXml/itemProps2.xml><?xml version="1.0" encoding="utf-8"?>
-<ds:datastoreItem xmlns:ds="http://schemas.openxmlformats.org/officeDocument/2006/customXml" ds:itemID="{4F44C90D-2A62-4985-9618-3460247437B1}">
-  <ds:schemaRefs>
-    <ds:schemaRef ds:uri="http://schemas.microsoft.com/sharepoint/v3/contenttype/forms"/>
   </ds:schemaRefs>
 </ds:datastoreItem>
 </file>
